--- a/docs/presentaciones/classes/clase-224-metricas-de-fairness-demographic-parity-equalized-odds-calibration-presentacion.pptx
+++ b/docs/presentaciones/classes/clase-224-metricas-de-fairness-demographic-parity-equalized-odds-calibration-presentacion.pptx
@@ -3272,7 +3272,7 @@
                 </a:solidFill>
                 <a:latin typeface="Segoe UI"/>
               </a:rPr>
-              <a:t>Parte: 7 — Ética, Fairness y Privacidad · Fuente: Barocas, Hardt, Narayanan — Fairness and Machine Learning cap. 3 + Hardt, Price, Srebro (NeurIPS 2016) Equality of Opportunity in Supervised Learning.  Duración estimada: 75 min.</a:t>
+              <a:t>Parte: 7 — Ética, Fairness y Privacidad · Fuente: Barocas, Hardt, Narayanan — Fairness and Machine Learning cap. 3 + Hardt, Price, Srebro (NeurIPS 2016) Equality of Opportunity in Supervised Learning.  Duración estimada: 75 min. · Nivel: Intermedio-Avanzado</a:t>
             </a:r>
           </a:p>
         </p:txBody>
@@ -3581,7 +3581,7 @@
                 </a:solidFill>
                 <a:latin typeface="Segoe UI"/>
               </a:rPr>
-              <a:t>Parte: 7 — Ética, Fairness y Privacidad · Fuente: Barocas, Hardt, Narayanan — Fairness and Machine Learning cap. 3 + Hardt, Price, Srebro (NeurIPS 2016) Equality of Opportunity in Supervised Learning.  Duración estimada: 75 min.</a:t>
+              <a:t>Parte: 7 — Ética, Fairness y Privacidad · Fuente: Barocas, Hardt, Narayanan — Fairness and Machine Learning cap. 3 + Hardt, Price, Srebro (NeurIPS 2016) Equality of Opportunity in Supervised Learning.  Duración estimada: 75 min. · Nivel: Intermedio-Avanzado</a:t>
             </a:r>
           </a:p>
         </p:txBody>
@@ -4823,7 +4823,7 @@
                 </a:solidFill>
                 <a:latin typeface="Segoe UI"/>
               </a:rPr>
-              <a:t>Dataset sintético binario con atributo protegido A∈{0,1} y base rates diferentes (necesario para activar el teorema de imposibilidad). Requiere: pip install numpy pandas scikit-learn matplotlib. fairlearn opcional — implementamos todo a mano.</a:t>
+              <a:t>No hay UNA definición de "justo". Demographic parity (misma tasa de aprobación por grupo), equalized odds (mismos TPR y FPR por grupo) y calibration (un score de 0.7 significa lo mismo en todos los grupos) son tres nociones razonables y, cuando las tasas</a:t>
             </a:r>
           </a:p>
         </p:txBody>
